--- a/遥控器显示/素材/v4/v4.pptx
+++ b/遥控器显示/素材/v4/v4.pptx
@@ -8902,7 +8902,7 @@
         </p:nvGrpSpPr>
         <p:grpSpPr>
           <a:xfrm>
-            <a:off x="2750820" y="340995"/>
+            <a:off x="2750820" y="1345565"/>
             <a:ext cx="6689725" cy="3756025"/>
             <a:chOff x="3937" y="1089"/>
             <a:chExt cx="10068" cy="4912"/>
@@ -9397,6 +9397,150 @@
           </p:txBody>
         </p:sp>
       </p:grpSp>
+      <p:sp>
+        <p:nvSpPr>
+          <p:cNvPr id="2" name="矩形 1"/>
+          <p:cNvSpPr/>
+          <p:nvPr/>
+        </p:nvSpPr>
+        <p:spPr>
+          <a:xfrm>
+            <a:off x="2750820" y="95885"/>
+            <a:ext cx="2231237" cy="1250989"/>
+          </a:xfrm>
+          <a:prstGeom prst="rect">
+            <a:avLst/>
+          </a:prstGeom>
+          <a:solidFill>
+            <a:srgbClr val="88CFF0"/>
+          </a:solidFill>
+          <a:ln w="12700" cmpd="sng">
+            <a:solidFill>
+              <a:srgbClr val="04120C"/>
+            </a:solidFill>
+            <a:prstDash val="solid"/>
+          </a:ln>
+        </p:spPr>
+        <p:style>
+          <a:lnRef idx="2">
+            <a:schemeClr val="accent1">
+              <a:lumMod val="75000"/>
+            </a:schemeClr>
+          </a:lnRef>
+          <a:fillRef idx="1">
+            <a:schemeClr val="accent1"/>
+          </a:fillRef>
+          <a:effectRef idx="0">
+            <a:srgbClr val="FFFFFF"/>
+          </a:effectRef>
+          <a:fontRef idx="minor">
+            <a:schemeClr val="lt1"/>
+          </a:fontRef>
+        </p:style>
+        <p:txBody>
+          <a:bodyPr rtlCol="0" anchor="ctr"/>
+          <a:p>
+            <a:pPr algn="ctr"/>
+            <a:endParaRPr lang="zh-CN" altLang="en-US"/>
+          </a:p>
+        </p:txBody>
+      </p:sp>
+      <p:sp>
+        <p:nvSpPr>
+          <p:cNvPr id="3" name="矩形 2"/>
+          <p:cNvSpPr/>
+          <p:nvPr/>
+        </p:nvSpPr>
+        <p:spPr>
+          <a:xfrm>
+            <a:off x="4975860" y="95885"/>
+            <a:ext cx="2231237" cy="1250989"/>
+          </a:xfrm>
+          <a:prstGeom prst="rect">
+            <a:avLst/>
+          </a:prstGeom>
+          <a:solidFill>
+            <a:srgbClr val="88CFF0"/>
+          </a:solidFill>
+          <a:ln w="12700" cmpd="sng">
+            <a:solidFill>
+              <a:srgbClr val="04120C"/>
+            </a:solidFill>
+            <a:prstDash val="solid"/>
+          </a:ln>
+        </p:spPr>
+        <p:style>
+          <a:lnRef idx="2">
+            <a:schemeClr val="accent1">
+              <a:lumMod val="75000"/>
+            </a:schemeClr>
+          </a:lnRef>
+          <a:fillRef idx="1">
+            <a:schemeClr val="accent1"/>
+          </a:fillRef>
+          <a:effectRef idx="0">
+            <a:srgbClr val="FFFFFF"/>
+          </a:effectRef>
+          <a:fontRef idx="minor">
+            <a:schemeClr val="lt1"/>
+          </a:fontRef>
+        </p:style>
+        <p:txBody>
+          <a:bodyPr rtlCol="0" anchor="ctr"/>
+          <a:p>
+            <a:pPr algn="ctr"/>
+            <a:endParaRPr lang="zh-CN" altLang="en-US"/>
+          </a:p>
+        </p:txBody>
+      </p:sp>
+      <p:sp>
+        <p:nvSpPr>
+          <p:cNvPr id="4" name="矩形 3"/>
+          <p:cNvSpPr/>
+          <p:nvPr/>
+        </p:nvSpPr>
+        <p:spPr>
+          <a:xfrm>
+            <a:off x="7210425" y="95885"/>
+            <a:ext cx="2231237" cy="1250989"/>
+          </a:xfrm>
+          <a:prstGeom prst="rect">
+            <a:avLst/>
+          </a:prstGeom>
+          <a:solidFill>
+            <a:srgbClr val="88CFF0"/>
+          </a:solidFill>
+          <a:ln w="12700" cmpd="sng">
+            <a:solidFill>
+              <a:srgbClr val="04120C"/>
+            </a:solidFill>
+            <a:prstDash val="solid"/>
+          </a:ln>
+        </p:spPr>
+        <p:style>
+          <a:lnRef idx="2">
+            <a:schemeClr val="accent1">
+              <a:lumMod val="75000"/>
+            </a:schemeClr>
+          </a:lnRef>
+          <a:fillRef idx="1">
+            <a:schemeClr val="accent1"/>
+          </a:fillRef>
+          <a:effectRef idx="0">
+            <a:srgbClr val="FFFFFF"/>
+          </a:effectRef>
+          <a:fontRef idx="minor">
+            <a:schemeClr val="lt1"/>
+          </a:fontRef>
+        </p:style>
+        <p:txBody>
+          <a:bodyPr rtlCol="0" anchor="ctr"/>
+          <a:p>
+            <a:pPr algn="ctr"/>
+            <a:endParaRPr lang="zh-CN" altLang="en-US"/>
+          </a:p>
+        </p:txBody>
+      </p:sp>
     </p:spTree>
     <p:custDataLst>
       <p:tags r:id="rId1"/>

--- a/遥控器显示/素材/v4/v4.pptx
+++ b/遥控器显示/素材/v4/v4.pptx
@@ -117,7 +117,7 @@
             <a:srgbClr val="A4A3A4"/>
           </p15:clr>
         </p15:guide>
-        <p15:guide id="2" pos="3840" userDrawn="1">
+        <p15:guide id="2" pos="3837" userDrawn="1">
           <p15:clr>
             <a:srgbClr val="A4A3A4"/>
           </p15:clr>
@@ -9502,6 +9502,198 @@
         <p:spPr>
           <a:xfrm>
             <a:off x="7210425" y="95885"/>
+            <a:ext cx="2231237" cy="1250989"/>
+          </a:xfrm>
+          <a:prstGeom prst="rect">
+            <a:avLst/>
+          </a:prstGeom>
+          <a:solidFill>
+            <a:srgbClr val="88CFF0"/>
+          </a:solidFill>
+          <a:ln w="12700" cmpd="sng">
+            <a:solidFill>
+              <a:srgbClr val="04120C"/>
+            </a:solidFill>
+            <a:prstDash val="solid"/>
+          </a:ln>
+        </p:spPr>
+        <p:style>
+          <a:lnRef idx="2">
+            <a:schemeClr val="accent1">
+              <a:lumMod val="75000"/>
+            </a:schemeClr>
+          </a:lnRef>
+          <a:fillRef idx="1">
+            <a:schemeClr val="accent1"/>
+          </a:fillRef>
+          <a:effectRef idx="0">
+            <a:srgbClr val="FFFFFF"/>
+          </a:effectRef>
+          <a:fontRef idx="minor">
+            <a:schemeClr val="lt1"/>
+          </a:fontRef>
+        </p:style>
+        <p:txBody>
+          <a:bodyPr rtlCol="0" anchor="ctr"/>
+          <a:p>
+            <a:pPr algn="ctr"/>
+            <a:endParaRPr lang="zh-CN" altLang="en-US"/>
+          </a:p>
+        </p:txBody>
+      </p:sp>
+      <p:sp>
+        <p:nvSpPr>
+          <p:cNvPr id="5" name="矩形 4"/>
+          <p:cNvSpPr/>
+          <p:nvPr/>
+        </p:nvSpPr>
+        <p:spPr>
+          <a:xfrm>
+            <a:off x="519430" y="95885"/>
+            <a:ext cx="2231237" cy="1250989"/>
+          </a:xfrm>
+          <a:prstGeom prst="rect">
+            <a:avLst/>
+          </a:prstGeom>
+          <a:solidFill>
+            <a:srgbClr val="88CFF0"/>
+          </a:solidFill>
+          <a:ln w="12700" cmpd="sng">
+            <a:solidFill>
+              <a:srgbClr val="04120C"/>
+            </a:solidFill>
+            <a:prstDash val="solid"/>
+          </a:ln>
+        </p:spPr>
+        <p:style>
+          <a:lnRef idx="2">
+            <a:schemeClr val="accent1">
+              <a:lumMod val="75000"/>
+            </a:schemeClr>
+          </a:lnRef>
+          <a:fillRef idx="1">
+            <a:schemeClr val="accent1"/>
+          </a:fillRef>
+          <a:effectRef idx="0">
+            <a:srgbClr val="FFFFFF"/>
+          </a:effectRef>
+          <a:fontRef idx="minor">
+            <a:schemeClr val="lt1"/>
+          </a:fontRef>
+        </p:style>
+        <p:txBody>
+          <a:bodyPr rtlCol="0" anchor="ctr"/>
+          <a:p>
+            <a:pPr algn="ctr"/>
+            <a:endParaRPr lang="zh-CN" altLang="en-US"/>
+          </a:p>
+        </p:txBody>
+      </p:sp>
+      <p:sp>
+        <p:nvSpPr>
+          <p:cNvPr id="6" name="矩形 5"/>
+          <p:cNvSpPr/>
+          <p:nvPr/>
+        </p:nvSpPr>
+        <p:spPr>
+          <a:xfrm>
+            <a:off x="519430" y="1345565"/>
+            <a:ext cx="2231237" cy="1250989"/>
+          </a:xfrm>
+          <a:prstGeom prst="rect">
+            <a:avLst/>
+          </a:prstGeom>
+          <a:solidFill>
+            <a:srgbClr val="88CFF0"/>
+          </a:solidFill>
+          <a:ln w="12700" cmpd="sng">
+            <a:solidFill>
+              <a:srgbClr val="04120C"/>
+            </a:solidFill>
+            <a:prstDash val="solid"/>
+          </a:ln>
+        </p:spPr>
+        <p:style>
+          <a:lnRef idx="2">
+            <a:schemeClr val="accent1">
+              <a:lumMod val="75000"/>
+            </a:schemeClr>
+          </a:lnRef>
+          <a:fillRef idx="1">
+            <a:schemeClr val="accent1"/>
+          </a:fillRef>
+          <a:effectRef idx="0">
+            <a:srgbClr val="FFFFFF"/>
+          </a:effectRef>
+          <a:fontRef idx="minor">
+            <a:schemeClr val="lt1"/>
+          </a:fontRef>
+        </p:style>
+        <p:txBody>
+          <a:bodyPr rtlCol="0" anchor="ctr"/>
+          <a:p>
+            <a:pPr algn="ctr"/>
+            <a:endParaRPr lang="zh-CN" altLang="en-US"/>
+          </a:p>
+        </p:txBody>
+      </p:sp>
+      <p:sp>
+        <p:nvSpPr>
+          <p:cNvPr id="7" name="矩形 6"/>
+          <p:cNvSpPr/>
+          <p:nvPr/>
+        </p:nvSpPr>
+        <p:spPr>
+          <a:xfrm>
+            <a:off x="519430" y="2596515"/>
+            <a:ext cx="2231237" cy="1250989"/>
+          </a:xfrm>
+          <a:prstGeom prst="rect">
+            <a:avLst/>
+          </a:prstGeom>
+          <a:solidFill>
+            <a:srgbClr val="88CFF0"/>
+          </a:solidFill>
+          <a:ln w="12700" cmpd="sng">
+            <a:solidFill>
+              <a:srgbClr val="04120C"/>
+            </a:solidFill>
+            <a:prstDash val="solid"/>
+          </a:ln>
+        </p:spPr>
+        <p:style>
+          <a:lnRef idx="2">
+            <a:schemeClr val="accent1">
+              <a:lumMod val="75000"/>
+            </a:schemeClr>
+          </a:lnRef>
+          <a:fillRef idx="1">
+            <a:schemeClr val="accent1"/>
+          </a:fillRef>
+          <a:effectRef idx="0">
+            <a:srgbClr val="FFFFFF"/>
+          </a:effectRef>
+          <a:fontRef idx="minor">
+            <a:schemeClr val="lt1"/>
+          </a:fontRef>
+        </p:style>
+        <p:txBody>
+          <a:bodyPr rtlCol="0" anchor="ctr"/>
+          <a:p>
+            <a:pPr algn="ctr"/>
+            <a:endParaRPr lang="zh-CN" altLang="en-US"/>
+          </a:p>
+        </p:txBody>
+      </p:sp>
+      <p:sp>
+        <p:nvSpPr>
+          <p:cNvPr id="8" name="矩形 7"/>
+          <p:cNvSpPr/>
+          <p:nvPr/>
+        </p:nvSpPr>
+        <p:spPr>
+          <a:xfrm>
+            <a:off x="519430" y="3847465"/>
             <a:ext cx="2231237" cy="1250989"/>
           </a:xfrm>
           <a:prstGeom prst="rect">
